--- a/DataStructuresAndAlgorithms/Lecture 06 - Graphs - Max Flow/Lecture 06 - Graphs - Max Flow.pptx
+++ b/DataStructuresAndAlgorithms/Lecture 06 - Graphs - Max Flow/Lecture 06 - Graphs - Max Flow.pptx
@@ -383,7 +383,7 @@
             <a:pPr indent="0" algn="r">
               <a:buNone/>
             </a:pPr>
-            <a:fld id="{01A28134-ADBA-4840-9005-08C601799DB9}" type="slidenum">
+            <a:fld id="{2F208110-970C-47D1-80EE-D08FA53A223C}" type="slidenum">
               <a:rPr b="0" lang="en-US" sz="1400" spc="-1" strike="noStrike">
                 <a:solidFill>
                   <a:srgbClr val="000000"/>
@@ -437,7 +437,7 @@
         <p:spPr>
           <a:xfrm>
             <a:off x="1376280" y="1336680"/>
-            <a:ext cx="4799520" cy="3599640"/>
+            <a:ext cx="4799160" cy="3599280"/>
           </a:xfrm>
           <a:prstGeom prst="rect">
             <a:avLst/>
@@ -460,7 +460,7 @@
         <p:spPr>
           <a:xfrm>
             <a:off x="756000" y="5145120"/>
-            <a:ext cx="6039000" cy="4201200"/>
+            <a:ext cx="6038640" cy="4200840"/>
           </a:xfrm>
           <a:prstGeom prst="rect">
             <a:avLst/>
@@ -496,7 +496,7 @@
         <p:spPr>
           <a:xfrm>
             <a:off x="0" y="10155240"/>
-            <a:ext cx="3267360" cy="527760"/>
+            <a:ext cx="3267000" cy="527400"/>
           </a:xfrm>
           <a:prstGeom prst="rect">
             <a:avLst/>
@@ -576,7 +576,7 @@
         <p:spPr>
           <a:xfrm>
             <a:off x="1376280" y="1336680"/>
-            <a:ext cx="4799520" cy="3599640"/>
+            <a:ext cx="4799160" cy="3599280"/>
           </a:xfrm>
           <a:prstGeom prst="rect">
             <a:avLst/>
@@ -599,7 +599,7 @@
         <p:spPr>
           <a:xfrm>
             <a:off x="756000" y="5145120"/>
-            <a:ext cx="6039000" cy="4201200"/>
+            <a:ext cx="6038640" cy="4200840"/>
           </a:xfrm>
           <a:prstGeom prst="rect">
             <a:avLst/>
@@ -635,7 +635,7 @@
         <p:spPr>
           <a:xfrm>
             <a:off x="0" y="10155240"/>
-            <a:ext cx="3267360" cy="527760"/>
+            <a:ext cx="3267000" cy="527400"/>
           </a:xfrm>
           <a:prstGeom prst="rect">
             <a:avLst/>
@@ -715,7 +715,7 @@
         <p:spPr>
           <a:xfrm>
             <a:off x="1376280" y="1336680"/>
-            <a:ext cx="4799520" cy="3599640"/>
+            <a:ext cx="4799160" cy="3599280"/>
           </a:xfrm>
           <a:prstGeom prst="rect">
             <a:avLst/>
@@ -738,7 +738,7 @@
         <p:spPr>
           <a:xfrm>
             <a:off x="756000" y="5145120"/>
-            <a:ext cx="6039000" cy="4201200"/>
+            <a:ext cx="6038640" cy="4200840"/>
           </a:xfrm>
           <a:prstGeom prst="rect">
             <a:avLst/>
@@ -774,7 +774,7 @@
         <p:spPr>
           <a:xfrm>
             <a:off x="0" y="10155240"/>
-            <a:ext cx="3267360" cy="527760"/>
+            <a:ext cx="3267000" cy="527400"/>
           </a:xfrm>
           <a:prstGeom prst="rect">
             <a:avLst/>
@@ -854,7 +854,7 @@
         <p:spPr>
           <a:xfrm>
             <a:off x="1376280" y="1336680"/>
-            <a:ext cx="4799520" cy="3599640"/>
+            <a:ext cx="4799160" cy="3599280"/>
           </a:xfrm>
           <a:prstGeom prst="rect">
             <a:avLst/>
@@ -877,7 +877,7 @@
         <p:spPr>
           <a:xfrm>
             <a:off x="756000" y="5145120"/>
-            <a:ext cx="6039000" cy="4201200"/>
+            <a:ext cx="6038640" cy="4200840"/>
           </a:xfrm>
           <a:prstGeom prst="rect">
             <a:avLst/>
@@ -913,7 +913,7 @@
         <p:spPr>
           <a:xfrm>
             <a:off x="0" y="10155240"/>
-            <a:ext cx="3267360" cy="527760"/>
+            <a:ext cx="3267000" cy="527400"/>
           </a:xfrm>
           <a:prstGeom prst="rect">
             <a:avLst/>
@@ -993,7 +993,7 @@
         <p:spPr>
           <a:xfrm>
             <a:off x="1376280" y="1336680"/>
-            <a:ext cx="4799520" cy="3599640"/>
+            <a:ext cx="4799160" cy="3599280"/>
           </a:xfrm>
           <a:prstGeom prst="rect">
             <a:avLst/>
@@ -1016,7 +1016,7 @@
         <p:spPr>
           <a:xfrm>
             <a:off x="756000" y="5145120"/>
-            <a:ext cx="6039000" cy="4201200"/>
+            <a:ext cx="6038640" cy="4200840"/>
           </a:xfrm>
           <a:prstGeom prst="rect">
             <a:avLst/>
@@ -1052,7 +1052,7 @@
         <p:spPr>
           <a:xfrm>
             <a:off x="0" y="10155240"/>
-            <a:ext cx="3267360" cy="527760"/>
+            <a:ext cx="3267000" cy="527400"/>
           </a:xfrm>
           <a:prstGeom prst="rect">
             <a:avLst/>
@@ -1132,7 +1132,7 @@
         <p:spPr>
           <a:xfrm>
             <a:off x="1376280" y="1336680"/>
-            <a:ext cx="4799520" cy="3599640"/>
+            <a:ext cx="4799160" cy="3599280"/>
           </a:xfrm>
           <a:prstGeom prst="rect">
             <a:avLst/>
@@ -1155,7 +1155,7 @@
         <p:spPr>
           <a:xfrm>
             <a:off x="756000" y="5145120"/>
-            <a:ext cx="6039000" cy="4201200"/>
+            <a:ext cx="6038640" cy="4200840"/>
           </a:xfrm>
           <a:prstGeom prst="rect">
             <a:avLst/>
@@ -1191,7 +1191,7 @@
         <p:spPr>
           <a:xfrm>
             <a:off x="0" y="10155240"/>
-            <a:ext cx="3267360" cy="527760"/>
+            <a:ext cx="3267000" cy="527400"/>
           </a:xfrm>
           <a:prstGeom prst="rect">
             <a:avLst/>
@@ -1271,7 +1271,7 @@
         <p:spPr>
           <a:xfrm>
             <a:off x="1376280" y="1336680"/>
-            <a:ext cx="4799520" cy="3599640"/>
+            <a:ext cx="4799160" cy="3599280"/>
           </a:xfrm>
           <a:prstGeom prst="rect">
             <a:avLst/>
@@ -1294,7 +1294,7 @@
         <p:spPr>
           <a:xfrm>
             <a:off x="756000" y="5145120"/>
-            <a:ext cx="6039000" cy="4201200"/>
+            <a:ext cx="6038640" cy="4200840"/>
           </a:xfrm>
           <a:prstGeom prst="rect">
             <a:avLst/>
@@ -1330,7 +1330,7 @@
         <p:spPr>
           <a:xfrm>
             <a:off x="0" y="10155240"/>
-            <a:ext cx="3267360" cy="527760"/>
+            <a:ext cx="3267000" cy="527400"/>
           </a:xfrm>
           <a:prstGeom prst="rect">
             <a:avLst/>
@@ -1410,7 +1410,7 @@
         <p:spPr>
           <a:xfrm>
             <a:off x="1376280" y="1336680"/>
-            <a:ext cx="4799520" cy="3599640"/>
+            <a:ext cx="4799160" cy="3599280"/>
           </a:xfrm>
           <a:prstGeom prst="rect">
             <a:avLst/>
@@ -1433,7 +1433,7 @@
         <p:spPr>
           <a:xfrm>
             <a:off x="756000" y="5145120"/>
-            <a:ext cx="6039000" cy="4201200"/>
+            <a:ext cx="6038640" cy="4200840"/>
           </a:xfrm>
           <a:prstGeom prst="rect">
             <a:avLst/>
@@ -1469,7 +1469,7 @@
         <p:spPr>
           <a:xfrm>
             <a:off x="0" y="10155240"/>
-            <a:ext cx="3267360" cy="527760"/>
+            <a:ext cx="3267000" cy="527400"/>
           </a:xfrm>
           <a:prstGeom prst="rect">
             <a:avLst/>
@@ -1549,7 +1549,7 @@
         <p:spPr>
           <a:xfrm>
             <a:off x="1376280" y="1336680"/>
-            <a:ext cx="4799520" cy="3599640"/>
+            <a:ext cx="4799160" cy="3599280"/>
           </a:xfrm>
           <a:prstGeom prst="rect">
             <a:avLst/>
@@ -1572,7 +1572,7 @@
         <p:spPr>
           <a:xfrm>
             <a:off x="756000" y="5145120"/>
-            <a:ext cx="6039000" cy="4201200"/>
+            <a:ext cx="6038640" cy="4200840"/>
           </a:xfrm>
           <a:prstGeom prst="rect">
             <a:avLst/>
@@ -1608,7 +1608,7 @@
         <p:spPr>
           <a:xfrm>
             <a:off x="0" y="10155240"/>
-            <a:ext cx="3267360" cy="527760"/>
+            <a:ext cx="3267000" cy="527400"/>
           </a:xfrm>
           <a:prstGeom prst="rect">
             <a:avLst/>
@@ -1688,7 +1688,7 @@
         <p:spPr>
           <a:xfrm>
             <a:off x="1376280" y="1336680"/>
-            <a:ext cx="4799520" cy="3599640"/>
+            <a:ext cx="4799160" cy="3599280"/>
           </a:xfrm>
           <a:prstGeom prst="rect">
             <a:avLst/>
@@ -1711,7 +1711,7 @@
         <p:spPr>
           <a:xfrm>
             <a:off x="756000" y="5145120"/>
-            <a:ext cx="6039000" cy="4201200"/>
+            <a:ext cx="6038640" cy="4200840"/>
           </a:xfrm>
           <a:prstGeom prst="rect">
             <a:avLst/>
@@ -1747,7 +1747,7 @@
         <p:spPr>
           <a:xfrm>
             <a:off x="0" y="10155240"/>
-            <a:ext cx="3267360" cy="527760"/>
+            <a:ext cx="3267000" cy="527400"/>
           </a:xfrm>
           <a:prstGeom prst="rect">
             <a:avLst/>
@@ -1827,7 +1827,7 @@
         <p:spPr>
           <a:xfrm>
             <a:off x="1376280" y="1336680"/>
-            <a:ext cx="4799520" cy="3599640"/>
+            <a:ext cx="4799160" cy="3599280"/>
           </a:xfrm>
           <a:prstGeom prst="rect">
             <a:avLst/>
@@ -1850,7 +1850,7 @@
         <p:spPr>
           <a:xfrm>
             <a:off x="756000" y="5145120"/>
-            <a:ext cx="6039000" cy="4201200"/>
+            <a:ext cx="6038640" cy="4200840"/>
           </a:xfrm>
           <a:prstGeom prst="rect">
             <a:avLst/>
@@ -1886,7 +1886,7 @@
         <p:spPr>
           <a:xfrm>
             <a:off x="0" y="10155240"/>
-            <a:ext cx="3267360" cy="527760"/>
+            <a:ext cx="3267000" cy="527400"/>
           </a:xfrm>
           <a:prstGeom prst="rect">
             <a:avLst/>
@@ -1966,7 +1966,7 @@
         <p:spPr>
           <a:xfrm>
             <a:off x="1376280" y="1336680"/>
-            <a:ext cx="4799520" cy="3599640"/>
+            <a:ext cx="4799160" cy="3599280"/>
           </a:xfrm>
           <a:prstGeom prst="rect">
             <a:avLst/>
@@ -1989,7 +1989,7 @@
         <p:spPr>
           <a:xfrm>
             <a:off x="756000" y="5145120"/>
-            <a:ext cx="6039000" cy="4201200"/>
+            <a:ext cx="6038640" cy="4200840"/>
           </a:xfrm>
           <a:prstGeom prst="rect">
             <a:avLst/>
@@ -2025,7 +2025,7 @@
         <p:spPr>
           <a:xfrm>
             <a:off x="0" y="10155240"/>
-            <a:ext cx="3267360" cy="527760"/>
+            <a:ext cx="3267000" cy="527400"/>
           </a:xfrm>
           <a:prstGeom prst="rect">
             <a:avLst/>
@@ -2105,7 +2105,7 @@
         <p:spPr>
           <a:xfrm>
             <a:off x="1376280" y="1336680"/>
-            <a:ext cx="4799520" cy="3599640"/>
+            <a:ext cx="4799160" cy="3599280"/>
           </a:xfrm>
           <a:prstGeom prst="rect">
             <a:avLst/>
@@ -2128,7 +2128,7 @@
         <p:spPr>
           <a:xfrm>
             <a:off x="756000" y="5145120"/>
-            <a:ext cx="6039000" cy="4201200"/>
+            <a:ext cx="6038640" cy="4200840"/>
           </a:xfrm>
           <a:prstGeom prst="rect">
             <a:avLst/>
@@ -2164,7 +2164,7 @@
         <p:spPr>
           <a:xfrm>
             <a:off x="0" y="10155240"/>
-            <a:ext cx="3267360" cy="527760"/>
+            <a:ext cx="3267000" cy="527400"/>
           </a:xfrm>
           <a:prstGeom prst="rect">
             <a:avLst/>
@@ -2244,7 +2244,7 @@
         <p:spPr>
           <a:xfrm>
             <a:off x="1376280" y="1336680"/>
-            <a:ext cx="4799520" cy="3599640"/>
+            <a:ext cx="4799160" cy="3599280"/>
           </a:xfrm>
           <a:prstGeom prst="rect">
             <a:avLst/>
@@ -2267,7 +2267,7 @@
         <p:spPr>
           <a:xfrm>
             <a:off x="756000" y="5145120"/>
-            <a:ext cx="6039000" cy="4201200"/>
+            <a:ext cx="6038640" cy="4200840"/>
           </a:xfrm>
           <a:prstGeom prst="rect">
             <a:avLst/>
@@ -2303,7 +2303,7 @@
         <p:spPr>
           <a:xfrm>
             <a:off x="0" y="10155240"/>
-            <a:ext cx="3267360" cy="527760"/>
+            <a:ext cx="3267000" cy="527400"/>
           </a:xfrm>
           <a:prstGeom prst="rect">
             <a:avLst/>
@@ -2383,7 +2383,7 @@
         <p:spPr>
           <a:xfrm>
             <a:off x="1376280" y="1336680"/>
-            <a:ext cx="4799520" cy="3599640"/>
+            <a:ext cx="4799160" cy="3599280"/>
           </a:xfrm>
           <a:prstGeom prst="rect">
             <a:avLst/>
@@ -2406,7 +2406,7 @@
         <p:spPr>
           <a:xfrm>
             <a:off x="756000" y="5145120"/>
-            <a:ext cx="6039000" cy="4201200"/>
+            <a:ext cx="6038640" cy="4200840"/>
           </a:xfrm>
           <a:prstGeom prst="rect">
             <a:avLst/>
@@ -2442,7 +2442,7 @@
         <p:spPr>
           <a:xfrm>
             <a:off x="0" y="10155240"/>
-            <a:ext cx="3267360" cy="527760"/>
+            <a:ext cx="3267000" cy="527400"/>
           </a:xfrm>
           <a:prstGeom prst="rect">
             <a:avLst/>
@@ -2522,7 +2522,7 @@
         <p:spPr>
           <a:xfrm>
             <a:off x="1376280" y="1336680"/>
-            <a:ext cx="4799520" cy="3599640"/>
+            <a:ext cx="4799160" cy="3599280"/>
           </a:xfrm>
           <a:prstGeom prst="rect">
             <a:avLst/>
@@ -2545,7 +2545,7 @@
         <p:spPr>
           <a:xfrm>
             <a:off x="756000" y="5145120"/>
-            <a:ext cx="6039000" cy="4201200"/>
+            <a:ext cx="6038640" cy="4200840"/>
           </a:xfrm>
           <a:prstGeom prst="rect">
             <a:avLst/>
@@ -2581,7 +2581,7 @@
         <p:spPr>
           <a:xfrm>
             <a:off x="0" y="10155240"/>
-            <a:ext cx="3267360" cy="527760"/>
+            <a:ext cx="3267000" cy="527400"/>
           </a:xfrm>
           <a:prstGeom prst="rect">
             <a:avLst/>
@@ -2661,7 +2661,7 @@
         <p:spPr>
           <a:xfrm>
             <a:off x="1376280" y="1336680"/>
-            <a:ext cx="4799520" cy="3599640"/>
+            <a:ext cx="4799160" cy="3599280"/>
           </a:xfrm>
           <a:prstGeom prst="rect">
             <a:avLst/>
@@ -2684,7 +2684,7 @@
         <p:spPr>
           <a:xfrm>
             <a:off x="756000" y="5145120"/>
-            <a:ext cx="6039000" cy="4201200"/>
+            <a:ext cx="6038640" cy="4200840"/>
           </a:xfrm>
           <a:prstGeom prst="rect">
             <a:avLst/>
@@ -2720,7 +2720,7 @@
         <p:spPr>
           <a:xfrm>
             <a:off x="0" y="10155240"/>
-            <a:ext cx="3267360" cy="527760"/>
+            <a:ext cx="3267000" cy="527400"/>
           </a:xfrm>
           <a:prstGeom prst="rect">
             <a:avLst/>
@@ -2800,7 +2800,7 @@
         <p:spPr>
           <a:xfrm>
             <a:off x="1376280" y="1336680"/>
-            <a:ext cx="4799520" cy="3599640"/>
+            <a:ext cx="4799160" cy="3599280"/>
           </a:xfrm>
           <a:prstGeom prst="rect">
             <a:avLst/>
@@ -2823,7 +2823,7 @@
         <p:spPr>
           <a:xfrm>
             <a:off x="756000" y="5145120"/>
-            <a:ext cx="6039000" cy="4201200"/>
+            <a:ext cx="6038640" cy="4200840"/>
           </a:xfrm>
           <a:prstGeom prst="rect">
             <a:avLst/>
@@ -2859,7 +2859,7 @@
         <p:spPr>
           <a:xfrm>
             <a:off x="0" y="10155240"/>
-            <a:ext cx="3267360" cy="527760"/>
+            <a:ext cx="3267000" cy="527400"/>
           </a:xfrm>
           <a:prstGeom prst="rect">
             <a:avLst/>
@@ -2939,7 +2939,7 @@
         <p:spPr>
           <a:xfrm>
             <a:off x="1376280" y="1336680"/>
-            <a:ext cx="4799520" cy="3599640"/>
+            <a:ext cx="4799160" cy="3599280"/>
           </a:xfrm>
           <a:prstGeom prst="rect">
             <a:avLst/>
@@ -2962,7 +2962,7 @@
         <p:spPr>
           <a:xfrm>
             <a:off x="756000" y="5145120"/>
-            <a:ext cx="6039000" cy="4201200"/>
+            <a:ext cx="6038640" cy="4200840"/>
           </a:xfrm>
           <a:prstGeom prst="rect">
             <a:avLst/>
@@ -2998,7 +2998,7 @@
         <p:spPr>
           <a:xfrm>
             <a:off x="0" y="10155240"/>
-            <a:ext cx="3267360" cy="527760"/>
+            <a:ext cx="3267000" cy="527400"/>
           </a:xfrm>
           <a:prstGeom prst="rect">
             <a:avLst/>
@@ -6029,7 +6029,7 @@
         <p:spPr>
           <a:xfrm>
             <a:off x="0" y="3150000"/>
-            <a:ext cx="9711360" cy="1251360"/>
+            <a:ext cx="9711000" cy="1251000"/>
           </a:xfrm>
           <a:prstGeom prst="rect">
             <a:avLst/>
@@ -6833,7 +6833,7 @@
         <p:spPr>
           <a:xfrm>
             <a:off x="0" y="3150000"/>
-            <a:ext cx="9711360" cy="1251360"/>
+            <a:ext cx="9711000" cy="1251000"/>
           </a:xfrm>
           <a:prstGeom prst="rect">
             <a:avLst/>
@@ -6913,7 +6913,7 @@
         <p:spPr>
           <a:xfrm>
             <a:off x="0" y="3150000"/>
-            <a:ext cx="9711360" cy="1251360"/>
+            <a:ext cx="9711000" cy="1251000"/>
           </a:xfrm>
           <a:prstGeom prst="rect">
             <a:avLst/>
@@ -7717,7 +7717,7 @@
         <p:spPr>
           <a:xfrm>
             <a:off x="0" y="3150000"/>
-            <a:ext cx="9711360" cy="1251360"/>
+            <a:ext cx="9711000" cy="1251000"/>
           </a:xfrm>
           <a:prstGeom prst="rect">
             <a:avLst/>
@@ -8521,7 +8521,7 @@
         <p:spPr>
           <a:xfrm>
             <a:off x="0" y="180000"/>
-            <a:ext cx="9711360" cy="1251360"/>
+            <a:ext cx="9711000" cy="1251000"/>
           </a:xfrm>
           <a:prstGeom prst="rect">
             <a:avLst/>
@@ -8568,7 +8568,7 @@
         <p:spPr>
           <a:xfrm>
             <a:off x="7560000" y="6840000"/>
-            <a:ext cx="2511360" cy="531360"/>
+            <a:ext cx="2511000" cy="531000"/>
           </a:xfrm>
           <a:prstGeom prst="rect">
             <a:avLst/>
@@ -8615,7 +8615,7 @@
         <p:spPr>
           <a:xfrm>
             <a:off x="900000" y="6840000"/>
-            <a:ext cx="6471360" cy="531360"/>
+            <a:ext cx="6471000" cy="531000"/>
           </a:xfrm>
           <a:prstGeom prst="rect">
             <a:avLst/>
@@ -8662,7 +8662,7 @@
         <p:spPr>
           <a:xfrm>
             <a:off x="180000" y="6840000"/>
-            <a:ext cx="531360" cy="531360"/>
+            <a:ext cx="531000" cy="531000"/>
           </a:xfrm>
           <a:prstGeom prst="rect">
             <a:avLst/>
@@ -9464,7 +9464,7 @@
         <p:spPr>
           <a:xfrm>
             <a:off x="0" y="180000"/>
-            <a:ext cx="9711360" cy="1251360"/>
+            <a:ext cx="9711000" cy="1251000"/>
           </a:xfrm>
           <a:prstGeom prst="rect">
             <a:avLst/>
@@ -9511,7 +9511,7 @@
         <p:spPr>
           <a:xfrm>
             <a:off x="7560000" y="6840000"/>
-            <a:ext cx="2511360" cy="531360"/>
+            <a:ext cx="2511000" cy="531000"/>
           </a:xfrm>
           <a:prstGeom prst="rect">
             <a:avLst/>
@@ -9558,7 +9558,7 @@
         <p:spPr>
           <a:xfrm>
             <a:off x="900000" y="6840000"/>
-            <a:ext cx="6471360" cy="531360"/>
+            <a:ext cx="6471000" cy="531000"/>
           </a:xfrm>
           <a:prstGeom prst="rect">
             <a:avLst/>
@@ -9605,7 +9605,7 @@
         <p:spPr>
           <a:xfrm>
             <a:off x="180000" y="6840000"/>
-            <a:ext cx="531360" cy="531360"/>
+            <a:ext cx="531000" cy="531000"/>
           </a:xfrm>
           <a:prstGeom prst="rect">
             <a:avLst/>
@@ -10182,7 +10182,7 @@
         <p:spPr>
           <a:xfrm>
             <a:off x="0" y="180000"/>
-            <a:ext cx="9711360" cy="1251360"/>
+            <a:ext cx="9711000" cy="1251000"/>
           </a:xfrm>
           <a:prstGeom prst="rect">
             <a:avLst/>
@@ -10229,7 +10229,7 @@
         <p:spPr>
           <a:xfrm>
             <a:off x="7560000" y="6840000"/>
-            <a:ext cx="2511360" cy="531360"/>
+            <a:ext cx="2511000" cy="531000"/>
           </a:xfrm>
           <a:prstGeom prst="rect">
             <a:avLst/>
@@ -10276,7 +10276,7 @@
         <p:spPr>
           <a:xfrm>
             <a:off x="900000" y="6840000"/>
-            <a:ext cx="6471360" cy="531360"/>
+            <a:ext cx="6471000" cy="531000"/>
           </a:xfrm>
           <a:prstGeom prst="rect">
             <a:avLst/>
@@ -10323,7 +10323,7 @@
         <p:spPr>
           <a:xfrm>
             <a:off x="180000" y="6840000"/>
-            <a:ext cx="531360" cy="531360"/>
+            <a:ext cx="531000" cy="531000"/>
           </a:xfrm>
           <a:prstGeom prst="rect">
             <a:avLst/>
@@ -11350,7 +11350,7 @@
         <p:spPr>
           <a:xfrm>
             <a:off x="0" y="180000"/>
-            <a:ext cx="9711360" cy="1251360"/>
+            <a:ext cx="9711000" cy="1251000"/>
           </a:xfrm>
           <a:prstGeom prst="rect">
             <a:avLst/>
@@ -11397,7 +11397,7 @@
         <p:spPr>
           <a:xfrm>
             <a:off x="7560000" y="6840000"/>
-            <a:ext cx="2511360" cy="531360"/>
+            <a:ext cx="2511000" cy="531000"/>
           </a:xfrm>
           <a:prstGeom prst="rect">
             <a:avLst/>
@@ -11444,7 +11444,7 @@
         <p:spPr>
           <a:xfrm>
             <a:off x="900000" y="6840000"/>
-            <a:ext cx="6471360" cy="531360"/>
+            <a:ext cx="6471000" cy="531000"/>
           </a:xfrm>
           <a:prstGeom prst="rect">
             <a:avLst/>
@@ -11491,7 +11491,7 @@
         <p:spPr>
           <a:xfrm>
             <a:off x="180000" y="6840000"/>
-            <a:ext cx="531360" cy="531360"/>
+            <a:ext cx="531000" cy="531000"/>
           </a:xfrm>
           <a:prstGeom prst="rect">
             <a:avLst/>
@@ -11569,7 +11569,7 @@
         <p:spPr>
           <a:xfrm>
             <a:off x="0" y="180000"/>
-            <a:ext cx="9711360" cy="1251360"/>
+            <a:ext cx="9711000" cy="1251000"/>
           </a:xfrm>
           <a:prstGeom prst="rect">
             <a:avLst/>
@@ -11616,7 +11616,7 @@
         <p:spPr>
           <a:xfrm>
             <a:off x="7560000" y="6840000"/>
-            <a:ext cx="2511360" cy="531360"/>
+            <a:ext cx="2511000" cy="531000"/>
           </a:xfrm>
           <a:prstGeom prst="rect">
             <a:avLst/>
@@ -11663,7 +11663,7 @@
         <p:spPr>
           <a:xfrm>
             <a:off x="900000" y="6840000"/>
-            <a:ext cx="6471360" cy="531360"/>
+            <a:ext cx="6471000" cy="531000"/>
           </a:xfrm>
           <a:prstGeom prst="rect">
             <a:avLst/>
@@ -11710,7 +11710,7 @@
         <p:spPr>
           <a:xfrm>
             <a:off x="180000" y="6840000"/>
-            <a:ext cx="531360" cy="531360"/>
+            <a:ext cx="531000" cy="531000"/>
           </a:xfrm>
           <a:prstGeom prst="rect">
             <a:avLst/>
@@ -12062,7 +12062,7 @@
         <p:spPr>
           <a:xfrm>
             <a:off x="0" y="180000"/>
-            <a:ext cx="9711360" cy="1251360"/>
+            <a:ext cx="9711000" cy="1251000"/>
           </a:xfrm>
           <a:prstGeom prst="rect">
             <a:avLst/>
@@ -12109,7 +12109,7 @@
         <p:spPr>
           <a:xfrm>
             <a:off x="7560000" y="6840000"/>
-            <a:ext cx="2511360" cy="531360"/>
+            <a:ext cx="2511000" cy="531000"/>
           </a:xfrm>
           <a:prstGeom prst="rect">
             <a:avLst/>
@@ -12156,7 +12156,7 @@
         <p:spPr>
           <a:xfrm>
             <a:off x="900000" y="6840000"/>
-            <a:ext cx="6471360" cy="531360"/>
+            <a:ext cx="6471000" cy="531000"/>
           </a:xfrm>
           <a:prstGeom prst="rect">
             <a:avLst/>
@@ -12203,7 +12203,7 @@
         <p:spPr>
           <a:xfrm>
             <a:off x="180000" y="6840000"/>
-            <a:ext cx="531360" cy="531360"/>
+            <a:ext cx="531000" cy="531000"/>
           </a:xfrm>
           <a:prstGeom prst="rect">
             <a:avLst/>
@@ -12555,7 +12555,7 @@
         <p:spPr>
           <a:xfrm>
             <a:off x="0" y="180000"/>
-            <a:ext cx="9711360" cy="1251360"/>
+            <a:ext cx="9711000" cy="1251000"/>
           </a:xfrm>
           <a:prstGeom prst="rect">
             <a:avLst/>
@@ -12602,7 +12602,7 @@
         <p:spPr>
           <a:xfrm>
             <a:off x="7560000" y="6840000"/>
-            <a:ext cx="2511360" cy="531360"/>
+            <a:ext cx="2511000" cy="531000"/>
           </a:xfrm>
           <a:prstGeom prst="rect">
             <a:avLst/>
@@ -12649,7 +12649,7 @@
         <p:spPr>
           <a:xfrm>
             <a:off x="900000" y="6840000"/>
-            <a:ext cx="6471360" cy="531360"/>
+            <a:ext cx="6471000" cy="531000"/>
           </a:xfrm>
           <a:prstGeom prst="rect">
             <a:avLst/>
@@ -12696,7 +12696,7 @@
         <p:spPr>
           <a:xfrm>
             <a:off x="180000" y="6840000"/>
-            <a:ext cx="531360" cy="531360"/>
+            <a:ext cx="531000" cy="531000"/>
           </a:xfrm>
           <a:prstGeom prst="rect">
             <a:avLst/>
@@ -13048,7 +13048,7 @@
         <p:spPr>
           <a:xfrm>
             <a:off x="0" y="3150000"/>
-            <a:ext cx="9711360" cy="1251360"/>
+            <a:ext cx="9711000" cy="1251000"/>
           </a:xfrm>
           <a:prstGeom prst="rect">
             <a:avLst/>
@@ -13627,7 +13627,7 @@
         <p:spPr>
           <a:xfrm>
             <a:off x="0" y="180000"/>
-            <a:ext cx="9711360" cy="1251360"/>
+            <a:ext cx="9711000" cy="1251000"/>
           </a:xfrm>
           <a:prstGeom prst="rect">
             <a:avLst/>
@@ -13674,7 +13674,7 @@
         <p:spPr>
           <a:xfrm>
             <a:off x="7560000" y="6840000"/>
-            <a:ext cx="2511360" cy="531360"/>
+            <a:ext cx="2511000" cy="531000"/>
           </a:xfrm>
           <a:prstGeom prst="rect">
             <a:avLst/>
@@ -13721,7 +13721,7 @@
         <p:spPr>
           <a:xfrm>
             <a:off x="900000" y="6840000"/>
-            <a:ext cx="6471360" cy="531360"/>
+            <a:ext cx="6471000" cy="531000"/>
           </a:xfrm>
           <a:prstGeom prst="rect">
             <a:avLst/>
@@ -13768,7 +13768,7 @@
         <p:spPr>
           <a:xfrm>
             <a:off x="180000" y="6840000"/>
-            <a:ext cx="531360" cy="531360"/>
+            <a:ext cx="531000" cy="531000"/>
           </a:xfrm>
           <a:prstGeom prst="rect">
             <a:avLst/>
@@ -14345,7 +14345,7 @@
         <p:spPr>
           <a:xfrm>
             <a:off x="0" y="180000"/>
-            <a:ext cx="9711360" cy="1251360"/>
+            <a:ext cx="9711000" cy="1251000"/>
           </a:xfrm>
           <a:prstGeom prst="rect">
             <a:avLst/>
@@ -14392,7 +14392,7 @@
         <p:spPr>
           <a:xfrm>
             <a:off x="7560000" y="6840000"/>
-            <a:ext cx="2511360" cy="531360"/>
+            <a:ext cx="2511000" cy="531000"/>
           </a:xfrm>
           <a:prstGeom prst="rect">
             <a:avLst/>
@@ -14439,7 +14439,7 @@
         <p:spPr>
           <a:xfrm>
             <a:off x="900000" y="6840000"/>
-            <a:ext cx="6471360" cy="531360"/>
+            <a:ext cx="6471000" cy="531000"/>
           </a:xfrm>
           <a:prstGeom prst="rect">
             <a:avLst/>
@@ -14486,7 +14486,7 @@
         <p:spPr>
           <a:xfrm>
             <a:off x="180000" y="6840000"/>
-            <a:ext cx="531360" cy="531360"/>
+            <a:ext cx="531000" cy="531000"/>
           </a:xfrm>
           <a:prstGeom prst="rect">
             <a:avLst/>
@@ -14613,7 +14613,7 @@
         <p:spPr>
           <a:xfrm>
             <a:off x="0" y="180000"/>
-            <a:ext cx="9711360" cy="1251360"/>
+            <a:ext cx="9711000" cy="1251000"/>
           </a:xfrm>
           <a:prstGeom prst="rect">
             <a:avLst/>
@@ -14660,7 +14660,7 @@
         <p:spPr>
           <a:xfrm>
             <a:off x="7560000" y="6840000"/>
-            <a:ext cx="2511360" cy="531360"/>
+            <a:ext cx="2511000" cy="531000"/>
           </a:xfrm>
           <a:prstGeom prst="rect">
             <a:avLst/>
@@ -14707,7 +14707,7 @@
         <p:spPr>
           <a:xfrm>
             <a:off x="900000" y="6840000"/>
-            <a:ext cx="6471360" cy="531360"/>
+            <a:ext cx="6471000" cy="531000"/>
           </a:xfrm>
           <a:prstGeom prst="rect">
             <a:avLst/>
@@ -14754,7 +14754,7 @@
         <p:spPr>
           <a:xfrm>
             <a:off x="180000" y="6840000"/>
-            <a:ext cx="531360" cy="531360"/>
+            <a:ext cx="531000" cy="531000"/>
           </a:xfrm>
           <a:prstGeom prst="rect">
             <a:avLst/>
@@ -14832,7 +14832,7 @@
         <p:spPr>
           <a:xfrm>
             <a:off x="0" y="180000"/>
-            <a:ext cx="9711360" cy="1251360"/>
+            <a:ext cx="9711000" cy="1251000"/>
           </a:xfrm>
           <a:prstGeom prst="rect">
             <a:avLst/>
@@ -14879,7 +14879,7 @@
         <p:spPr>
           <a:xfrm>
             <a:off x="7560000" y="6840000"/>
-            <a:ext cx="2511360" cy="531360"/>
+            <a:ext cx="2511000" cy="531000"/>
           </a:xfrm>
           <a:prstGeom prst="rect">
             <a:avLst/>
@@ -14926,7 +14926,7 @@
         <p:spPr>
           <a:xfrm>
             <a:off x="900000" y="6840000"/>
-            <a:ext cx="6471360" cy="531360"/>
+            <a:ext cx="6471000" cy="531000"/>
           </a:xfrm>
           <a:prstGeom prst="rect">
             <a:avLst/>
@@ -14973,7 +14973,7 @@
         <p:spPr>
           <a:xfrm>
             <a:off x="180000" y="6840000"/>
-            <a:ext cx="531360" cy="531360"/>
+            <a:ext cx="531000" cy="531000"/>
           </a:xfrm>
           <a:prstGeom prst="rect">
             <a:avLst/>
@@ -15775,7 +15775,7 @@
         <p:spPr>
           <a:xfrm>
             <a:off x="0" y="180000"/>
-            <a:ext cx="9711360" cy="1251360"/>
+            <a:ext cx="9711000" cy="1251000"/>
           </a:xfrm>
           <a:prstGeom prst="rect">
             <a:avLst/>
@@ -15822,7 +15822,7 @@
         <p:spPr>
           <a:xfrm>
             <a:off x="7560000" y="6840000"/>
-            <a:ext cx="2511360" cy="531360"/>
+            <a:ext cx="2511000" cy="531000"/>
           </a:xfrm>
           <a:prstGeom prst="rect">
             <a:avLst/>
@@ -15869,7 +15869,7 @@
         <p:spPr>
           <a:xfrm>
             <a:off x="900000" y="6840000"/>
-            <a:ext cx="6471360" cy="531360"/>
+            <a:ext cx="6471000" cy="531000"/>
           </a:xfrm>
           <a:prstGeom prst="rect">
             <a:avLst/>
@@ -15916,7 +15916,7 @@
         <p:spPr>
           <a:xfrm>
             <a:off x="180000" y="6840000"/>
-            <a:ext cx="531360" cy="531360"/>
+            <a:ext cx="531000" cy="531000"/>
           </a:xfrm>
           <a:prstGeom prst="rect">
             <a:avLst/>
@@ -16718,7 +16718,7 @@
         <p:spPr>
           <a:xfrm>
             <a:off x="0" y="3150000"/>
-            <a:ext cx="9711360" cy="1251360"/>
+            <a:ext cx="9711000" cy="1251000"/>
           </a:xfrm>
           <a:prstGeom prst="rect">
             <a:avLst/>
@@ -17072,7 +17072,7 @@
         <p:spPr>
           <a:xfrm>
             <a:off x="0" y="180000"/>
-            <a:ext cx="9711360" cy="1251360"/>
+            <a:ext cx="9711000" cy="1251000"/>
           </a:xfrm>
           <a:prstGeom prst="rect">
             <a:avLst/>
@@ -17119,7 +17119,7 @@
         <p:spPr>
           <a:xfrm>
             <a:off x="7560000" y="6840000"/>
-            <a:ext cx="2511360" cy="531360"/>
+            <a:ext cx="2511000" cy="531000"/>
           </a:xfrm>
           <a:prstGeom prst="rect">
             <a:avLst/>
@@ -17166,7 +17166,7 @@
         <p:spPr>
           <a:xfrm>
             <a:off x="900000" y="6840000"/>
-            <a:ext cx="6471360" cy="531360"/>
+            <a:ext cx="6471000" cy="531000"/>
           </a:xfrm>
           <a:prstGeom prst="rect">
             <a:avLst/>
@@ -17213,7 +17213,7 @@
         <p:spPr>
           <a:xfrm>
             <a:off x="180000" y="6840000"/>
-            <a:ext cx="531360" cy="531360"/>
+            <a:ext cx="531000" cy="531000"/>
           </a:xfrm>
           <a:prstGeom prst="rect">
             <a:avLst/>
@@ -17565,7 +17565,7 @@
         <p:spPr>
           <a:xfrm>
             <a:off x="0" y="180000"/>
-            <a:ext cx="9711360" cy="1251360"/>
+            <a:ext cx="9711000" cy="1251000"/>
           </a:xfrm>
           <a:prstGeom prst="rect">
             <a:avLst/>
@@ -17612,7 +17612,7 @@
         <p:spPr>
           <a:xfrm>
             <a:off x="7560000" y="6840000"/>
-            <a:ext cx="2511360" cy="531360"/>
+            <a:ext cx="2511000" cy="531000"/>
           </a:xfrm>
           <a:prstGeom prst="rect">
             <a:avLst/>
@@ -17659,7 +17659,7 @@
         <p:spPr>
           <a:xfrm>
             <a:off x="900000" y="6840000"/>
-            <a:ext cx="6471360" cy="531360"/>
+            <a:ext cx="6471000" cy="531000"/>
           </a:xfrm>
           <a:prstGeom prst="rect">
             <a:avLst/>
@@ -17706,7 +17706,7 @@
         <p:spPr>
           <a:xfrm>
             <a:off x="180000" y="6840000"/>
-            <a:ext cx="531360" cy="531360"/>
+            <a:ext cx="531000" cy="531000"/>
           </a:xfrm>
           <a:prstGeom prst="rect">
             <a:avLst/>
@@ -18058,7 +18058,7 @@
         <p:spPr>
           <a:xfrm>
             <a:off x="0" y="3150000"/>
-            <a:ext cx="9711360" cy="1251360"/>
+            <a:ext cx="9711000" cy="1251000"/>
           </a:xfrm>
           <a:prstGeom prst="rect">
             <a:avLst/>
@@ -19087,7 +19087,7 @@
         <p:spPr>
           <a:xfrm>
             <a:off x="0" y="3150000"/>
-            <a:ext cx="9711360" cy="1251360"/>
+            <a:ext cx="9711000" cy="1251000"/>
           </a:xfrm>
           <a:prstGeom prst="rect">
             <a:avLst/>
@@ -19167,7 +19167,7 @@
         <p:spPr>
           <a:xfrm>
             <a:off x="0" y="3150000"/>
-            <a:ext cx="9711360" cy="1251360"/>
+            <a:ext cx="9711000" cy="1251000"/>
           </a:xfrm>
           <a:prstGeom prst="rect">
             <a:avLst/>
@@ -19521,7 +19521,7 @@
         <p:spPr>
           <a:xfrm>
             <a:off x="0" y="3150000"/>
-            <a:ext cx="9711360" cy="1251360"/>
+            <a:ext cx="9711000" cy="1251000"/>
           </a:xfrm>
           <a:prstGeom prst="rect">
             <a:avLst/>
@@ -19875,7 +19875,7 @@
         <p:spPr>
           <a:xfrm>
             <a:off x="0" y="3150000"/>
-            <a:ext cx="9711360" cy="1251360"/>
+            <a:ext cx="9711000" cy="1251000"/>
           </a:xfrm>
           <a:prstGeom prst="rect">
             <a:avLst/>
@@ -20229,7 +20229,7 @@
         <p:spPr>
           <a:xfrm>
             <a:off x="0" y="3150000"/>
-            <a:ext cx="9711360" cy="1251360"/>
+            <a:ext cx="9711000" cy="1251000"/>
           </a:xfrm>
           <a:prstGeom prst="rect">
             <a:avLst/>
@@ -20808,7 +20808,7 @@
         <p:spPr>
           <a:xfrm>
             <a:off x="0" y="3150000"/>
-            <a:ext cx="9711360" cy="1251360"/>
+            <a:ext cx="9711000" cy="1251000"/>
           </a:xfrm>
           <a:prstGeom prst="rect">
             <a:avLst/>
@@ -20930,7 +20930,7 @@
         <p:spPr>
           <a:xfrm>
             <a:off x="360000" y="3330000"/>
-            <a:ext cx="9351360" cy="891360"/>
+            <a:ext cx="9351000" cy="891000"/>
           </a:xfrm>
           <a:prstGeom prst="rect">
             <a:avLst/>
@@ -20984,7 +20984,7 @@
         <p:spPr>
           <a:xfrm>
             <a:off x="540000" y="4680000"/>
-            <a:ext cx="9171360" cy="2511360"/>
+            <a:ext cx="9171000" cy="2511000"/>
           </a:xfrm>
           <a:prstGeom prst="rect">
             <a:avLst/>
@@ -21209,7 +21209,7 @@
         <p:spPr>
           <a:xfrm>
             <a:off x="360000" y="360000"/>
-            <a:ext cx="9351360" cy="891360"/>
+            <a:ext cx="9351000" cy="891000"/>
           </a:xfrm>
           <a:prstGeom prst="rect">
             <a:avLst/>
@@ -21263,7 +21263,7 @@
         <p:spPr>
           <a:xfrm>
             <a:off x="360000" y="1980000"/>
-            <a:ext cx="9171360" cy="4671360"/>
+            <a:ext cx="9171000" cy="4671000"/>
           </a:xfrm>
           <a:prstGeom prst="rect">
             <a:avLst/>
@@ -21374,7 +21374,7 @@
         <p:spPr>
           <a:xfrm>
             <a:off x="7608600" y="6886080"/>
-            <a:ext cx="2276640" cy="356400"/>
+            <a:ext cx="2276280" cy="356040"/>
           </a:xfrm>
           <a:prstGeom prst="rect">
             <a:avLst/>
@@ -21428,7 +21428,7 @@
         <p:spPr>
           <a:xfrm>
             <a:off x="897120" y="6886080"/>
-            <a:ext cx="6438600" cy="356400"/>
+            <a:ext cx="6438240" cy="356040"/>
           </a:xfrm>
           <a:prstGeom prst="rect">
             <a:avLst/>
@@ -21486,7 +21486,7 @@
         <p:spPr>
           <a:xfrm>
             <a:off x="217440" y="1551600"/>
-            <a:ext cx="4736520" cy="2715120"/>
+            <a:ext cx="4736160" cy="2714760"/>
           </a:xfrm>
           <a:prstGeom prst="rect">
             <a:avLst/>
@@ -21509,7 +21509,7 @@
         <p:spPr>
           <a:xfrm>
             <a:off x="4228920" y="3886200"/>
-            <a:ext cx="5013360" cy="2851200"/>
+            <a:ext cx="5013000" cy="2850840"/>
           </a:xfrm>
           <a:prstGeom prst="rect">
             <a:avLst/>
@@ -21533,7 +21533,7 @@
         <p:spPr>
           <a:xfrm>
             <a:off x="7739280" y="1600200"/>
-            <a:ext cx="1404360" cy="913680"/>
+            <a:ext cx="1404000" cy="913320"/>
           </a:xfrm>
           <a:prstGeom prst="rect">
             <a:avLst/>
@@ -21552,7 +21552,7 @@
         <p:spPr>
           <a:xfrm>
             <a:off x="5486400" y="3448800"/>
-            <a:ext cx="2477160" cy="366120"/>
+            <a:ext cx="2476800" cy="365760"/>
           </a:xfrm>
           <a:prstGeom prst="rect">
             <a:avLst/>
@@ -21636,7 +21636,7 @@
         <p:spPr>
           <a:xfrm>
             <a:off x="360000" y="360000"/>
-            <a:ext cx="9351360" cy="891360"/>
+            <a:ext cx="9351000" cy="891000"/>
           </a:xfrm>
           <a:prstGeom prst="rect">
             <a:avLst/>
@@ -21690,7 +21690,7 @@
         <p:spPr>
           <a:xfrm>
             <a:off x="360000" y="1980000"/>
-            <a:ext cx="9171360" cy="4671360"/>
+            <a:ext cx="9171000" cy="4671000"/>
           </a:xfrm>
           <a:prstGeom prst="rect">
             <a:avLst/>
@@ -21801,7 +21801,7 @@
         <p:spPr>
           <a:xfrm>
             <a:off x="7608600" y="6886080"/>
-            <a:ext cx="2276640" cy="356400"/>
+            <a:ext cx="2276280" cy="356040"/>
           </a:xfrm>
           <a:prstGeom prst="rect">
             <a:avLst/>
@@ -21855,7 +21855,7 @@
         <p:spPr>
           <a:xfrm>
             <a:off x="897120" y="6886080"/>
-            <a:ext cx="6438600" cy="356400"/>
+            <a:ext cx="6438240" cy="356040"/>
           </a:xfrm>
           <a:prstGeom prst="rect">
             <a:avLst/>
@@ -21913,7 +21913,7 @@
         <p:spPr>
           <a:xfrm>
             <a:off x="217440" y="1551600"/>
-            <a:ext cx="4736520" cy="2715120"/>
+            <a:ext cx="4736160" cy="2714760"/>
           </a:xfrm>
           <a:prstGeom prst="rect">
             <a:avLst/>
@@ -21936,7 +21936,7 @@
         <p:spPr>
           <a:xfrm>
             <a:off x="4343400" y="3975480"/>
-            <a:ext cx="5008320" cy="2685600"/>
+            <a:ext cx="5007960" cy="2685240"/>
           </a:xfrm>
           <a:prstGeom prst="rect">
             <a:avLst/>
@@ -21960,7 +21960,7 @@
         <p:spPr>
           <a:xfrm>
             <a:off x="7739280" y="1600200"/>
-            <a:ext cx="1404360" cy="1142280"/>
+            <a:ext cx="1404000" cy="1141920"/>
           </a:xfrm>
           <a:prstGeom prst="rect">
             <a:avLst/>
@@ -21979,7 +21979,7 @@
         <p:spPr>
           <a:xfrm>
             <a:off x="961200" y="4755960"/>
-            <a:ext cx="3382200" cy="1746000"/>
+            <a:ext cx="3381840" cy="1745640"/>
           </a:xfrm>
           <a:prstGeom prst="rect">
             <a:avLst/>
@@ -22071,7 +22071,7 @@
         <p:spPr>
           <a:xfrm>
             <a:off x="5029560" y="1980360"/>
-            <a:ext cx="3129480" cy="917280"/>
+            <a:ext cx="3129120" cy="916920"/>
           </a:xfrm>
           <a:prstGeom prst="rect">
             <a:avLst/>
@@ -22155,7 +22155,7 @@
         <p:spPr>
           <a:xfrm>
             <a:off x="360000" y="360000"/>
-            <a:ext cx="9351360" cy="891360"/>
+            <a:ext cx="9351000" cy="891000"/>
           </a:xfrm>
           <a:prstGeom prst="rect">
             <a:avLst/>
@@ -22209,7 +22209,7 @@
         <p:spPr>
           <a:xfrm>
             <a:off x="360000" y="1980000"/>
-            <a:ext cx="9171360" cy="4671360"/>
+            <a:ext cx="9171000" cy="4671000"/>
           </a:xfrm>
           <a:prstGeom prst="rect">
             <a:avLst/>
@@ -22320,7 +22320,7 @@
         <p:spPr>
           <a:xfrm>
             <a:off x="7608600" y="6886080"/>
-            <a:ext cx="2276640" cy="356400"/>
+            <a:ext cx="2276280" cy="356040"/>
           </a:xfrm>
           <a:prstGeom prst="rect">
             <a:avLst/>
@@ -22374,7 +22374,7 @@
         <p:spPr>
           <a:xfrm>
             <a:off x="897120" y="6886080"/>
-            <a:ext cx="6438600" cy="356400"/>
+            <a:ext cx="6438240" cy="356040"/>
           </a:xfrm>
           <a:prstGeom prst="rect">
             <a:avLst/>
@@ -22432,7 +22432,7 @@
         <p:spPr>
           <a:xfrm>
             <a:off x="217440" y="1551600"/>
-            <a:ext cx="4736520" cy="2715120"/>
+            <a:ext cx="4736160" cy="2714760"/>
           </a:xfrm>
           <a:prstGeom prst="rect">
             <a:avLst/>
@@ -22455,7 +22455,7 @@
         <p:spPr>
           <a:xfrm>
             <a:off x="4572000" y="4097880"/>
-            <a:ext cx="4779720" cy="2563200"/>
+            <a:ext cx="4779360" cy="2562840"/>
           </a:xfrm>
           <a:prstGeom prst="rect">
             <a:avLst/>
@@ -22479,7 +22479,7 @@
         <p:spPr>
           <a:xfrm>
             <a:off x="7739280" y="1600200"/>
-            <a:ext cx="1404360" cy="1142280"/>
+            <a:ext cx="1404000" cy="1141920"/>
           </a:xfrm>
           <a:prstGeom prst="rect">
             <a:avLst/>
@@ -22498,7 +22498,7 @@
         <p:spPr>
           <a:xfrm>
             <a:off x="5486400" y="3448800"/>
-            <a:ext cx="2477160" cy="366120"/>
+            <a:ext cx="2476800" cy="365760"/>
           </a:xfrm>
           <a:prstGeom prst="rect">
             <a:avLst/>
@@ -22582,7 +22582,7 @@
         <p:spPr>
           <a:xfrm>
             <a:off x="360000" y="360000"/>
-            <a:ext cx="9351360" cy="891360"/>
+            <a:ext cx="9351000" cy="891000"/>
           </a:xfrm>
           <a:prstGeom prst="rect">
             <a:avLst/>
@@ -22636,7 +22636,7 @@
         <p:spPr>
           <a:xfrm>
             <a:off x="360000" y="1980000"/>
-            <a:ext cx="9171360" cy="4671360"/>
+            <a:ext cx="9171000" cy="4671000"/>
           </a:xfrm>
           <a:prstGeom prst="rect">
             <a:avLst/>
@@ -22747,7 +22747,7 @@
         <p:spPr>
           <a:xfrm>
             <a:off x="7608600" y="6886080"/>
-            <a:ext cx="2276640" cy="356400"/>
+            <a:ext cx="2276280" cy="356040"/>
           </a:xfrm>
           <a:prstGeom prst="rect">
             <a:avLst/>
@@ -22801,7 +22801,7 @@
         <p:spPr>
           <a:xfrm>
             <a:off x="897120" y="6886080"/>
-            <a:ext cx="6438600" cy="356400"/>
+            <a:ext cx="6438240" cy="356040"/>
           </a:xfrm>
           <a:prstGeom prst="rect">
             <a:avLst/>
@@ -22859,7 +22859,7 @@
         <p:spPr>
           <a:xfrm>
             <a:off x="217440" y="1551600"/>
-            <a:ext cx="4736520" cy="2715120"/>
+            <a:ext cx="4736160" cy="2714760"/>
           </a:xfrm>
           <a:prstGeom prst="rect">
             <a:avLst/>
@@ -22882,7 +22882,7 @@
         <p:spPr>
           <a:xfrm>
             <a:off x="3886200" y="3734280"/>
-            <a:ext cx="5422680" cy="2888640"/>
+            <a:ext cx="5422320" cy="2888280"/>
           </a:xfrm>
           <a:prstGeom prst="rect">
             <a:avLst/>
@@ -22906,7 +22906,7 @@
         <p:spPr>
           <a:xfrm>
             <a:off x="7739280" y="1600200"/>
-            <a:ext cx="1404360" cy="1599480"/>
+            <a:ext cx="1404000" cy="1599120"/>
           </a:xfrm>
           <a:prstGeom prst="rect">
             <a:avLst/>
@@ -22925,7 +22925,7 @@
         <p:spPr>
           <a:xfrm>
             <a:off x="961200" y="4755960"/>
-            <a:ext cx="3382200" cy="1746000"/>
+            <a:ext cx="3381840" cy="1745640"/>
           </a:xfrm>
           <a:prstGeom prst="rect">
             <a:avLst/>
@@ -23017,7 +23017,7 @@
         <p:spPr>
           <a:xfrm>
             <a:off x="5029560" y="1980360"/>
-            <a:ext cx="3129480" cy="917280"/>
+            <a:ext cx="3129120" cy="916920"/>
           </a:xfrm>
           <a:prstGeom prst="rect">
             <a:avLst/>
@@ -23101,7 +23101,7 @@
         <p:spPr>
           <a:xfrm>
             <a:off x="360000" y="360000"/>
-            <a:ext cx="9351360" cy="891360"/>
+            <a:ext cx="9351000" cy="891000"/>
           </a:xfrm>
           <a:prstGeom prst="rect">
             <a:avLst/>
@@ -23155,7 +23155,7 @@
         <p:spPr>
           <a:xfrm>
             <a:off x="360000" y="1980000"/>
-            <a:ext cx="9171360" cy="4671360"/>
+            <a:ext cx="9171000" cy="4671000"/>
           </a:xfrm>
           <a:prstGeom prst="rect">
             <a:avLst/>
@@ -23266,7 +23266,7 @@
         <p:spPr>
           <a:xfrm>
             <a:off x="7608600" y="6886080"/>
-            <a:ext cx="2276640" cy="356400"/>
+            <a:ext cx="2276280" cy="356040"/>
           </a:xfrm>
           <a:prstGeom prst="rect">
             <a:avLst/>
@@ -23320,7 +23320,7 @@
         <p:spPr>
           <a:xfrm>
             <a:off x="897120" y="6886080"/>
-            <a:ext cx="6438600" cy="356400"/>
+            <a:ext cx="6438240" cy="356040"/>
           </a:xfrm>
           <a:prstGeom prst="rect">
             <a:avLst/>
@@ -23378,7 +23378,7 @@
         <p:spPr>
           <a:xfrm>
             <a:off x="217440" y="1551600"/>
-            <a:ext cx="4736520" cy="2715120"/>
+            <a:ext cx="4736160" cy="2714760"/>
           </a:xfrm>
           <a:prstGeom prst="rect">
             <a:avLst/>
@@ -23401,7 +23401,7 @@
         <p:spPr>
           <a:xfrm>
             <a:off x="3886200" y="3734280"/>
-            <a:ext cx="5422680" cy="2888640"/>
+            <a:ext cx="5422320" cy="2888280"/>
           </a:xfrm>
           <a:prstGeom prst="rect">
             <a:avLst/>
@@ -23425,7 +23425,7 @@
         <p:spPr>
           <a:xfrm>
             <a:off x="7739280" y="1600200"/>
-            <a:ext cx="1404360" cy="1599480"/>
+            <a:ext cx="1404000" cy="1599120"/>
           </a:xfrm>
           <a:prstGeom prst="rect">
             <a:avLst/>
@@ -23444,7 +23444,7 @@
         <p:spPr>
           <a:xfrm>
             <a:off x="5486400" y="3448800"/>
-            <a:ext cx="2477160" cy="366120"/>
+            <a:ext cx="2476800" cy="365760"/>
           </a:xfrm>
           <a:prstGeom prst="rect">
             <a:avLst/>
@@ -23528,7 +23528,7 @@
         <p:spPr>
           <a:xfrm>
             <a:off x="360000" y="360000"/>
-            <a:ext cx="9351360" cy="891360"/>
+            <a:ext cx="9351000" cy="891000"/>
           </a:xfrm>
           <a:prstGeom prst="rect">
             <a:avLst/>
@@ -23582,7 +23582,7 @@
         <p:spPr>
           <a:xfrm>
             <a:off x="360000" y="1980000"/>
-            <a:ext cx="9171360" cy="4671360"/>
+            <a:ext cx="9171000" cy="4671000"/>
           </a:xfrm>
           <a:prstGeom prst="rect">
             <a:avLst/>
@@ -23693,7 +23693,7 @@
         <p:spPr>
           <a:xfrm>
             <a:off x="7608600" y="6886080"/>
-            <a:ext cx="2276640" cy="356400"/>
+            <a:ext cx="2276280" cy="356040"/>
           </a:xfrm>
           <a:prstGeom prst="rect">
             <a:avLst/>
@@ -23747,7 +23747,7 @@
         <p:spPr>
           <a:xfrm>
             <a:off x="897120" y="6886080"/>
-            <a:ext cx="6438600" cy="356400"/>
+            <a:ext cx="6438240" cy="356040"/>
           </a:xfrm>
           <a:prstGeom prst="rect">
             <a:avLst/>
@@ -23805,7 +23805,7 @@
         <p:spPr>
           <a:xfrm>
             <a:off x="217440" y="1551600"/>
-            <a:ext cx="4736520" cy="2715120"/>
+            <a:ext cx="4736160" cy="2714760"/>
           </a:xfrm>
           <a:prstGeom prst="rect">
             <a:avLst/>
@@ -23828,7 +23828,7 @@
         <p:spPr>
           <a:xfrm>
             <a:off x="4343400" y="3978000"/>
-            <a:ext cx="4965480" cy="2644920"/>
+            <a:ext cx="4965120" cy="2644560"/>
           </a:xfrm>
           <a:prstGeom prst="rect">
             <a:avLst/>
@@ -23847,7 +23847,7 @@
         <p:spPr>
           <a:xfrm>
             <a:off x="8915400" y="5594400"/>
-            <a:ext cx="393480" cy="228240"/>
+            <a:ext cx="393120" cy="227880"/>
           </a:xfrm>
           <a:prstGeom prst="leftArrow">
             <a:avLst>
@@ -23899,7 +23899,7 @@
         <p:spPr>
           <a:xfrm>
             <a:off x="6701400" y="6436800"/>
-            <a:ext cx="456840" cy="222120"/>
+            <a:ext cx="456480" cy="221760"/>
           </a:xfrm>
           <a:prstGeom prst="rightArrow">
             <a:avLst>
@@ -23956,7 +23956,7 @@
         <p:spPr>
           <a:xfrm>
             <a:off x="7739280" y="1600200"/>
-            <a:ext cx="1404360" cy="1599480"/>
+            <a:ext cx="1404000" cy="1599120"/>
           </a:xfrm>
           <a:prstGeom prst="rect">
             <a:avLst/>
@@ -23975,7 +23975,7 @@
         <p:spPr>
           <a:xfrm>
             <a:off x="961200" y="4756320"/>
-            <a:ext cx="3382200" cy="1746000"/>
+            <a:ext cx="3381840" cy="1745640"/>
           </a:xfrm>
           <a:prstGeom prst="rect">
             <a:avLst/>
@@ -24097,7 +24097,7 @@
         <p:spPr>
           <a:xfrm>
             <a:off x="360000" y="360000"/>
-            <a:ext cx="9351360" cy="891360"/>
+            <a:ext cx="9351000" cy="891000"/>
           </a:xfrm>
           <a:prstGeom prst="rect">
             <a:avLst/>
@@ -24151,7 +24151,7 @@
         <p:spPr>
           <a:xfrm>
             <a:off x="360000" y="1980000"/>
-            <a:ext cx="9171360" cy="4671360"/>
+            <a:ext cx="9171000" cy="4671000"/>
           </a:xfrm>
           <a:prstGeom prst="rect">
             <a:avLst/>
@@ -24262,7 +24262,7 @@
         <p:spPr>
           <a:xfrm>
             <a:off x="7608600" y="6886080"/>
-            <a:ext cx="2276640" cy="356400"/>
+            <a:ext cx="2276280" cy="356040"/>
           </a:xfrm>
           <a:prstGeom prst="rect">
             <a:avLst/>
@@ -24316,7 +24316,7 @@
         <p:spPr>
           <a:xfrm>
             <a:off x="897120" y="6886080"/>
-            <a:ext cx="6438600" cy="356400"/>
+            <a:ext cx="6438240" cy="356040"/>
           </a:xfrm>
           <a:prstGeom prst="rect">
             <a:avLst/>
@@ -24374,7 +24374,7 @@
         <p:spPr>
           <a:xfrm>
             <a:off x="217440" y="1551600"/>
-            <a:ext cx="4736520" cy="2715120"/>
+            <a:ext cx="4736160" cy="2714760"/>
           </a:xfrm>
           <a:prstGeom prst="rect">
             <a:avLst/>
@@ -24397,7 +24397,7 @@
         <p:spPr>
           <a:xfrm>
             <a:off x="4184640" y="3886200"/>
-            <a:ext cx="5033880" cy="2722680"/>
+            <a:ext cx="5033520" cy="2722320"/>
           </a:xfrm>
           <a:prstGeom prst="rect">
             <a:avLst/>
@@ -24421,7 +24421,7 @@
         <p:spPr>
           <a:xfrm>
             <a:off x="7739280" y="1600200"/>
-            <a:ext cx="1404360" cy="1828080"/>
+            <a:ext cx="1404000" cy="1827720"/>
           </a:xfrm>
           <a:prstGeom prst="rect">
             <a:avLst/>
@@ -24440,7 +24440,7 @@
         <p:spPr>
           <a:xfrm>
             <a:off x="961200" y="4755960"/>
-            <a:ext cx="3382200" cy="1746000"/>
+            <a:ext cx="3381840" cy="1745640"/>
           </a:xfrm>
           <a:prstGeom prst="rect">
             <a:avLst/>
@@ -24532,7 +24532,7 @@
         <p:spPr>
           <a:xfrm>
             <a:off x="5029560" y="1980360"/>
-            <a:ext cx="3129480" cy="917280"/>
+            <a:ext cx="3129120" cy="916920"/>
           </a:xfrm>
           <a:prstGeom prst="rect">
             <a:avLst/>
@@ -24616,7 +24616,7 @@
         <p:spPr>
           <a:xfrm>
             <a:off x="360000" y="360000"/>
-            <a:ext cx="9351360" cy="891360"/>
+            <a:ext cx="9351000" cy="891000"/>
           </a:xfrm>
           <a:prstGeom prst="rect">
             <a:avLst/>
@@ -24670,7 +24670,7 @@
         <p:spPr>
           <a:xfrm>
             <a:off x="360000" y="1980000"/>
-            <a:ext cx="9171360" cy="4671360"/>
+            <a:ext cx="9171000" cy="4671000"/>
           </a:xfrm>
           <a:prstGeom prst="rect">
             <a:avLst/>
@@ -24781,7 +24781,7 @@
         <p:spPr>
           <a:xfrm>
             <a:off x="7608600" y="6886080"/>
-            <a:ext cx="2276640" cy="356400"/>
+            <a:ext cx="2276280" cy="356040"/>
           </a:xfrm>
           <a:prstGeom prst="rect">
             <a:avLst/>
@@ -24835,7 +24835,7 @@
         <p:spPr>
           <a:xfrm>
             <a:off x="897120" y="6886080"/>
-            <a:ext cx="6438600" cy="356400"/>
+            <a:ext cx="6438240" cy="356040"/>
           </a:xfrm>
           <a:prstGeom prst="rect">
             <a:avLst/>
@@ -24893,7 +24893,7 @@
         <p:spPr>
           <a:xfrm>
             <a:off x="217440" y="1551600"/>
-            <a:ext cx="4736520" cy="2715120"/>
+            <a:ext cx="4736160" cy="2714760"/>
           </a:xfrm>
           <a:prstGeom prst="rect">
             <a:avLst/>
@@ -24916,7 +24916,7 @@
         <p:spPr>
           <a:xfrm>
             <a:off x="4114800" y="3848400"/>
-            <a:ext cx="5103720" cy="2760480"/>
+            <a:ext cx="5103360" cy="2760120"/>
           </a:xfrm>
           <a:prstGeom prst="rect">
             <a:avLst/>
@@ -24940,7 +24940,7 @@
         <p:spPr>
           <a:xfrm>
             <a:off x="7739280" y="1600560"/>
-            <a:ext cx="1404360" cy="1828080"/>
+            <a:ext cx="1404000" cy="1827720"/>
           </a:xfrm>
           <a:prstGeom prst="rect">
             <a:avLst/>
@@ -24959,7 +24959,7 @@
         <p:spPr>
           <a:xfrm>
             <a:off x="5486400" y="3376800"/>
-            <a:ext cx="2477160" cy="366120"/>
+            <a:ext cx="2476800" cy="365760"/>
           </a:xfrm>
           <a:prstGeom prst="rect">
             <a:avLst/>
@@ -25043,7 +25043,7 @@
         <p:spPr>
           <a:xfrm>
             <a:off x="360000" y="360000"/>
-            <a:ext cx="9351360" cy="891360"/>
+            <a:ext cx="9351000" cy="891000"/>
           </a:xfrm>
           <a:prstGeom prst="rect">
             <a:avLst/>
@@ -25097,7 +25097,7 @@
         <p:spPr>
           <a:xfrm>
             <a:off x="360000" y="1980000"/>
-            <a:ext cx="9171360" cy="4671360"/>
+            <a:ext cx="9171000" cy="4671000"/>
           </a:xfrm>
           <a:prstGeom prst="rect">
             <a:avLst/>
@@ -25208,7 +25208,7 @@
         <p:spPr>
           <a:xfrm>
             <a:off x="7608600" y="6886080"/>
-            <a:ext cx="2276640" cy="356400"/>
+            <a:ext cx="2276280" cy="356040"/>
           </a:xfrm>
           <a:prstGeom prst="rect">
             <a:avLst/>
@@ -25262,7 +25262,7 @@
         <p:spPr>
           <a:xfrm>
             <a:off x="897120" y="6886080"/>
-            <a:ext cx="6438600" cy="356400"/>
+            <a:ext cx="6438240" cy="356040"/>
           </a:xfrm>
           <a:prstGeom prst="rect">
             <a:avLst/>
@@ -25320,7 +25320,7 @@
         <p:spPr>
           <a:xfrm>
             <a:off x="217440" y="1551600"/>
-            <a:ext cx="4736520" cy="2715120"/>
+            <a:ext cx="4736160" cy="2714760"/>
           </a:xfrm>
           <a:prstGeom prst="rect">
             <a:avLst/>
@@ -25344,7 +25344,7 @@
         <p:spPr>
           <a:xfrm>
             <a:off x="6629400" y="2057760"/>
-            <a:ext cx="1404360" cy="1828080"/>
+            <a:ext cx="1404000" cy="1827720"/>
           </a:xfrm>
           <a:prstGeom prst="rect">
             <a:avLst/>
@@ -25367,7 +25367,7 @@
         <p:spPr>
           <a:xfrm>
             <a:off x="3200400" y="4800600"/>
-            <a:ext cx="2501280" cy="1142640"/>
+            <a:ext cx="2500920" cy="1142280"/>
           </a:xfrm>
           <a:prstGeom prst="rect">
             <a:avLst/>
@@ -25386,7 +25386,7 @@
         <p:spPr>
           <a:xfrm>
             <a:off x="5943600" y="5029200"/>
-            <a:ext cx="587880" cy="359280"/>
+            <a:ext cx="587520" cy="358920"/>
           </a:xfrm>
           <a:prstGeom prst="rightArrow">
             <a:avLst>
@@ -25438,7 +25438,7 @@
         <p:spPr>
           <a:xfrm>
             <a:off x="6629400" y="5029200"/>
-            <a:ext cx="914040" cy="784800"/>
+            <a:ext cx="913680" cy="784440"/>
           </a:xfrm>
           <a:prstGeom prst="rect">
             <a:avLst/>
@@ -25528,7 +25528,7 @@
         <p:spPr>
           <a:xfrm>
             <a:off x="360000" y="360000"/>
-            <a:ext cx="9351360" cy="891360"/>
+            <a:ext cx="9351000" cy="891000"/>
           </a:xfrm>
           <a:prstGeom prst="rect">
             <a:avLst/>
@@ -25582,7 +25582,7 @@
         <p:spPr>
           <a:xfrm>
             <a:off x="360000" y="1980000"/>
-            <a:ext cx="9171360" cy="4671360"/>
+            <a:ext cx="9171000" cy="4671000"/>
           </a:xfrm>
           <a:prstGeom prst="rect">
             <a:avLst/>
@@ -25693,7 +25693,7 @@
         <p:spPr>
           <a:xfrm>
             <a:off x="7608600" y="6886080"/>
-            <a:ext cx="2276640" cy="356400"/>
+            <a:ext cx="2276280" cy="356040"/>
           </a:xfrm>
           <a:prstGeom prst="rect">
             <a:avLst/>
@@ -25747,7 +25747,7 @@
         <p:spPr>
           <a:xfrm>
             <a:off x="897120" y="6886080"/>
-            <a:ext cx="6438600" cy="356400"/>
+            <a:ext cx="6438240" cy="356040"/>
           </a:xfrm>
           <a:prstGeom prst="rect">
             <a:avLst/>
@@ -25805,7 +25805,7 @@
         <p:spPr>
           <a:xfrm>
             <a:off x="0" y="1305360"/>
-            <a:ext cx="5171400" cy="4409280"/>
+            <a:ext cx="5171040" cy="4408920"/>
           </a:xfrm>
           <a:prstGeom prst="rect">
             <a:avLst/>
@@ -25828,7 +25828,7 @@
         <p:spPr>
           <a:xfrm>
             <a:off x="5171760" y="3515040"/>
-            <a:ext cx="4561920" cy="3342600"/>
+            <a:ext cx="4561560" cy="3342240"/>
           </a:xfrm>
           <a:prstGeom prst="rect">
             <a:avLst/>
@@ -25877,7 +25877,7 @@
         <p:spPr>
           <a:xfrm>
             <a:off x="360000" y="360000"/>
-            <a:ext cx="9351360" cy="891360"/>
+            <a:ext cx="9351000" cy="891000"/>
           </a:xfrm>
           <a:prstGeom prst="rect">
             <a:avLst/>
@@ -25931,7 +25931,7 @@
         <p:spPr>
           <a:xfrm>
             <a:off x="360000" y="1980000"/>
-            <a:ext cx="9171360" cy="4671360"/>
+            <a:ext cx="9171000" cy="4671000"/>
           </a:xfrm>
           <a:prstGeom prst="rect">
             <a:avLst/>
@@ -26237,7 +26237,7 @@
         <p:spPr>
           <a:xfrm>
             <a:off x="7608600" y="6886080"/>
-            <a:ext cx="2276640" cy="356400"/>
+            <a:ext cx="2276280" cy="356040"/>
           </a:xfrm>
           <a:prstGeom prst="rect">
             <a:avLst/>
@@ -26291,7 +26291,7 @@
         <p:spPr>
           <a:xfrm>
             <a:off x="897120" y="6886080"/>
-            <a:ext cx="6438600" cy="356400"/>
+            <a:ext cx="6438240" cy="356040"/>
           </a:xfrm>
           <a:prstGeom prst="rect">
             <a:avLst/>
@@ -26375,7 +26375,7 @@
         <p:spPr>
           <a:xfrm>
             <a:off x="360000" y="3330000"/>
-            <a:ext cx="9351360" cy="891360"/>
+            <a:ext cx="9351000" cy="891000"/>
           </a:xfrm>
           <a:prstGeom prst="rect">
             <a:avLst/>
@@ -26482,7 +26482,7 @@
         <p:spPr>
           <a:xfrm>
             <a:off x="360000" y="360000"/>
-            <a:ext cx="9351360" cy="891360"/>
+            <a:ext cx="9351000" cy="891000"/>
           </a:xfrm>
           <a:prstGeom prst="rect">
             <a:avLst/>
@@ -26536,7 +26536,7 @@
         <p:spPr>
           <a:xfrm>
             <a:off x="360000" y="1980000"/>
-            <a:ext cx="9171360" cy="4671360"/>
+            <a:ext cx="9171000" cy="4671000"/>
           </a:xfrm>
           <a:prstGeom prst="rect">
             <a:avLst/>
@@ -26647,7 +26647,7 @@
         <p:spPr>
           <a:xfrm>
             <a:off x="7608600" y="6886080"/>
-            <a:ext cx="2276640" cy="356400"/>
+            <a:ext cx="2276280" cy="356040"/>
           </a:xfrm>
           <a:prstGeom prst="rect">
             <a:avLst/>
@@ -26701,7 +26701,7 @@
         <p:spPr>
           <a:xfrm>
             <a:off x="897120" y="6886080"/>
-            <a:ext cx="6438600" cy="356400"/>
+            <a:ext cx="6438240" cy="356040"/>
           </a:xfrm>
           <a:prstGeom prst="rect">
             <a:avLst/>
@@ -26755,7 +26755,7 @@
         <p:spPr>
           <a:xfrm>
             <a:off x="360000" y="1980000"/>
-            <a:ext cx="9171360" cy="4671360"/>
+            <a:ext cx="9171000" cy="4671000"/>
           </a:xfrm>
           <a:prstGeom prst="rect">
             <a:avLst/>
@@ -26837,7 +26837,7 @@
                 <a:latin typeface="Latin Modern Sans"/>
                 <a:ea typeface="DejaVu Sans"/>
               </a:rPr>
-              <a:t>Redes de tráfego (maximizar veÃ­culos que passam de um ponto a outro sem congestionamento).</a:t>
+              <a:t>Redes de tráfego (maximizar veiculos que passam de um ponto a outro sem congestionamento).</a:t>
             </a:r>
             <a:endParaRPr b="0" lang="en-US" sz="1500" spc="-1" strike="noStrike">
               <a:solidFill>
@@ -27050,7 +27050,7 @@
         <p:spPr>
           <a:xfrm>
             <a:off x="4293720" y="4343400"/>
-            <a:ext cx="4621320" cy="2307600"/>
+            <a:ext cx="4620960" cy="2307240"/>
           </a:xfrm>
           <a:prstGeom prst="rect">
             <a:avLst/>
@@ -27099,7 +27099,7 @@
         <p:spPr>
           <a:xfrm>
             <a:off x="360000" y="360000"/>
-            <a:ext cx="9351360" cy="891360"/>
+            <a:ext cx="9351000" cy="891000"/>
           </a:xfrm>
           <a:prstGeom prst="rect">
             <a:avLst/>
@@ -27153,7 +27153,7 @@
         <p:spPr>
           <a:xfrm>
             <a:off x="360000" y="1980000"/>
-            <a:ext cx="9171360" cy="4671360"/>
+            <a:ext cx="9171000" cy="4671000"/>
           </a:xfrm>
           <a:prstGeom prst="rect">
             <a:avLst/>
@@ -27264,7 +27264,7 @@
         <p:spPr>
           <a:xfrm>
             <a:off x="7608600" y="6886080"/>
-            <a:ext cx="2276640" cy="356400"/>
+            <a:ext cx="2276280" cy="356040"/>
           </a:xfrm>
           <a:prstGeom prst="rect">
             <a:avLst/>
@@ -27318,7 +27318,7 @@
         <p:spPr>
           <a:xfrm>
             <a:off x="897120" y="6886080"/>
-            <a:ext cx="6438600" cy="356400"/>
+            <a:ext cx="6438240" cy="356040"/>
           </a:xfrm>
           <a:prstGeom prst="rect">
             <a:avLst/>
@@ -27372,7 +27372,7 @@
         <p:spPr>
           <a:xfrm>
             <a:off x="360000" y="1980000"/>
-            <a:ext cx="9171360" cy="4671360"/>
+            <a:ext cx="9171000" cy="4671000"/>
           </a:xfrm>
           <a:prstGeom prst="rect">
             <a:avLst/>
@@ -27662,7 +27662,7 @@
         <p:spPr>
           <a:xfrm>
             <a:off x="1212480" y="4344120"/>
-            <a:ext cx="3587760" cy="2056320"/>
+            <a:ext cx="3587400" cy="2055960"/>
           </a:xfrm>
           <a:prstGeom prst="rect">
             <a:avLst/>
@@ -27681,7 +27681,7 @@
         <p:spPr>
           <a:xfrm>
             <a:off x="5486400" y="4800600"/>
-            <a:ext cx="4343040" cy="1369800"/>
+            <a:ext cx="4342680" cy="1369440"/>
           </a:xfrm>
           <a:prstGeom prst="rect">
             <a:avLst/>
@@ -27713,6 +27713,7 @@
                   <a:srgbClr val="000000"/>
                 </a:solidFill>
                 <a:latin typeface="Arial"/>
+                <a:ea typeface="DejaVu Sans"/>
               </a:rPr>
               <a:t>Agradecimento ao Igor pela elaboração do material de suporte!</a:t>
             </a:r>
@@ -27749,6 +27750,7 @@
                 </a:solidFill>
                 <a:uFillTx/>
                 <a:latin typeface="Arial"/>
+                <a:ea typeface="DejaVu Sans"/>
                 <a:hlinkClick r:id="rId2"/>
               </a:rPr>
               <a:t>https://www.youtube.com/watch?v=xC2tYIZvmgc</a:t>
@@ -27856,7 +27858,7 @@
         <p:spPr>
           <a:xfrm>
             <a:off x="360000" y="360000"/>
-            <a:ext cx="9351360" cy="891360"/>
+            <a:ext cx="9351000" cy="891000"/>
           </a:xfrm>
           <a:prstGeom prst="rect">
             <a:avLst/>
@@ -27910,7 +27912,7 @@
         <p:spPr>
           <a:xfrm>
             <a:off x="360000" y="1980000"/>
-            <a:ext cx="9171360" cy="4671360"/>
+            <a:ext cx="9171000" cy="4671000"/>
           </a:xfrm>
           <a:prstGeom prst="rect">
             <a:avLst/>
@@ -28021,7 +28023,7 @@
         <p:spPr>
           <a:xfrm>
             <a:off x="7608600" y="6886080"/>
-            <a:ext cx="2276640" cy="356400"/>
+            <a:ext cx="2276280" cy="356040"/>
           </a:xfrm>
           <a:prstGeom prst="rect">
             <a:avLst/>
@@ -28075,7 +28077,7 @@
         <p:spPr>
           <a:xfrm>
             <a:off x="897120" y="6886080"/>
-            <a:ext cx="6438600" cy="356400"/>
+            <a:ext cx="6438240" cy="356040"/>
           </a:xfrm>
           <a:prstGeom prst="rect">
             <a:avLst/>
@@ -28133,7 +28135,7 @@
         <p:spPr>
           <a:xfrm>
             <a:off x="4129920" y="3822120"/>
-            <a:ext cx="4099320" cy="2349720"/>
+            <a:ext cx="4098960" cy="2349360"/>
           </a:xfrm>
           <a:prstGeom prst="rect">
             <a:avLst/>
@@ -28152,7 +28154,7 @@
         <p:spPr>
           <a:xfrm>
             <a:off x="360000" y="1748880"/>
-            <a:ext cx="7050600" cy="2323440"/>
+            <a:ext cx="9469800" cy="2323080"/>
           </a:xfrm>
           <a:prstGeom prst="rect">
             <a:avLst/>
@@ -28209,7 +28211,7 @@
                 <a:latin typeface="Latin Modern Sans"/>
                 <a:ea typeface="DejaVu Sans"/>
               </a:rPr>
-              <a:t>P={p1,p2,…,pk} o conjunto de caminhos aumentantes escolhidos pelo algoritmo</a:t>
+              <a:t>* P={p1,p2,…,pk} o conjunto de caminhos aumentantes escolhidos pelo algoritmo</a:t>
             </a:r>
             <a:endParaRPr b="0" lang="en-US" sz="1600" spc="-1" strike="noStrike">
               <a:solidFill>
@@ -28232,7 +28234,7 @@
                 <a:latin typeface="Latin Modern Sans"/>
                 <a:ea typeface="DejaVu Sans"/>
               </a:rPr>
-              <a:t>b(pi) o bottleneck (capacidade mínima residual) do caminho pip_ipi​</a:t>
+              <a:t>* b(pi) o bottleneck (capacidade mínima residual) do caminho </a:t>
             </a:r>
             <a:endParaRPr b="0" lang="en-US" sz="1600" spc="-1" strike="noStrike">
               <a:solidFill>
@@ -28255,7 +28257,7 @@
                 <a:latin typeface="Latin Modern Sans"/>
                 <a:ea typeface="DejaVu Sans"/>
               </a:rPr>
-              <a:t>Então o fluxo máximo total pode ser escrito como:</a:t>
+              <a:t>* Então o fluxo máximo total pode ser escrito como:</a:t>
             </a:r>
             <a:endParaRPr b="0" lang="en-US" sz="1600" spc="-1" strike="noStrike">
               <a:solidFill>
@@ -28292,7 +28294,7 @@
         <p:spPr>
           <a:xfrm>
             <a:off x="914400" y="4343400"/>
-            <a:ext cx="2501280" cy="1142640"/>
+            <a:ext cx="2500920" cy="1142280"/>
           </a:xfrm>
           <a:prstGeom prst="rect">
             <a:avLst/>
@@ -28341,7 +28343,7 @@
         <p:spPr>
           <a:xfrm>
             <a:off x="360000" y="360000"/>
-            <a:ext cx="9351360" cy="891360"/>
+            <a:ext cx="9351000" cy="891000"/>
           </a:xfrm>
           <a:prstGeom prst="rect">
             <a:avLst/>
@@ -28395,7 +28397,7 @@
         <p:spPr>
           <a:xfrm>
             <a:off x="360000" y="1980000"/>
-            <a:ext cx="9171360" cy="4671360"/>
+            <a:ext cx="9171000" cy="4671000"/>
           </a:xfrm>
           <a:prstGeom prst="rect">
             <a:avLst/>
@@ -28506,7 +28508,7 @@
         <p:spPr>
           <a:xfrm>
             <a:off x="7608600" y="6886080"/>
-            <a:ext cx="2276640" cy="356400"/>
+            <a:ext cx="2276280" cy="356040"/>
           </a:xfrm>
           <a:prstGeom prst="rect">
             <a:avLst/>
@@ -28560,7 +28562,7 @@
         <p:spPr>
           <a:xfrm>
             <a:off x="897120" y="6886080"/>
-            <a:ext cx="6438600" cy="356400"/>
+            <a:ext cx="6438240" cy="356040"/>
           </a:xfrm>
           <a:prstGeom prst="rect">
             <a:avLst/>
@@ -28618,7 +28620,7 @@
         <p:spPr>
           <a:xfrm>
             <a:off x="217440" y="1551600"/>
-            <a:ext cx="4736520" cy="2715120"/>
+            <a:ext cx="4736160" cy="2714760"/>
           </a:xfrm>
           <a:prstGeom prst="rect">
             <a:avLst/>
@@ -28641,7 +28643,7 @@
         <p:spPr>
           <a:xfrm>
             <a:off x="4800600" y="3857040"/>
-            <a:ext cx="4875120" cy="2794320"/>
+            <a:ext cx="4874760" cy="2793960"/>
           </a:xfrm>
           <a:prstGeom prst="rect">
             <a:avLst/>
@@ -28659,13 +28661,13 @@
         </p:nvPicPr>
         <p:blipFill>
           <a:blip r:embed="rId3"/>
-          <a:srcRect l="0" t="0" r="0" b="62452"/>
+          <a:srcRect l="0" t="0" r="0" b="62437"/>
           <a:stretch/>
         </p:blipFill>
         <p:spPr>
           <a:xfrm>
             <a:off x="7739280" y="1600200"/>
-            <a:ext cx="1404360" cy="685080"/>
+            <a:ext cx="1404000" cy="684720"/>
           </a:xfrm>
           <a:prstGeom prst="rect">
             <a:avLst/>
@@ -28684,7 +28686,7 @@
         <p:spPr>
           <a:xfrm>
             <a:off x="960840" y="4755600"/>
-            <a:ext cx="3382200" cy="1746000"/>
+            <a:ext cx="3381840" cy="1745640"/>
           </a:xfrm>
           <a:prstGeom prst="rect">
             <a:avLst/>
@@ -28776,7 +28778,7 @@
         <p:spPr>
           <a:xfrm>
             <a:off x="5029200" y="1980000"/>
-            <a:ext cx="3129480" cy="917280"/>
+            <a:ext cx="3129120" cy="916920"/>
           </a:xfrm>
           <a:prstGeom prst="rect">
             <a:avLst/>
@@ -28830,7 +28832,7 @@
         <p:spPr>
           <a:xfrm>
             <a:off x="6209280" y="3519720"/>
-            <a:ext cx="2477160" cy="366120"/>
+            <a:ext cx="2476800" cy="365760"/>
           </a:xfrm>
           <a:prstGeom prst="rect">
             <a:avLst/>
@@ -28914,7 +28916,7 @@
         <p:spPr>
           <a:xfrm>
             <a:off x="360000" y="360000"/>
-            <a:ext cx="9351360" cy="891360"/>
+            <a:ext cx="9351000" cy="891000"/>
           </a:xfrm>
           <a:prstGeom prst="rect">
             <a:avLst/>
@@ -28968,7 +28970,7 @@
         <p:spPr>
           <a:xfrm>
             <a:off x="360000" y="1980000"/>
-            <a:ext cx="9171360" cy="4671360"/>
+            <a:ext cx="9171000" cy="4671000"/>
           </a:xfrm>
           <a:prstGeom prst="rect">
             <a:avLst/>
@@ -29079,7 +29081,7 @@
         <p:spPr>
           <a:xfrm>
             <a:off x="7608600" y="6886080"/>
-            <a:ext cx="2276640" cy="356400"/>
+            <a:ext cx="2276280" cy="356040"/>
           </a:xfrm>
           <a:prstGeom prst="rect">
             <a:avLst/>
@@ -29133,7 +29135,7 @@
         <p:spPr>
           <a:xfrm>
             <a:off x="897120" y="6886080"/>
-            <a:ext cx="6438600" cy="356400"/>
+            <a:ext cx="6438240" cy="356040"/>
           </a:xfrm>
           <a:prstGeom prst="rect">
             <a:avLst/>
@@ -29191,7 +29193,7 @@
         <p:spPr>
           <a:xfrm>
             <a:off x="217440" y="1551600"/>
-            <a:ext cx="4736520" cy="2715120"/>
+            <a:ext cx="4736160" cy="2714760"/>
           </a:xfrm>
           <a:prstGeom prst="rect">
             <a:avLst/>
@@ -29214,7 +29216,7 @@
         <p:spPr>
           <a:xfrm>
             <a:off x="4471920" y="3886200"/>
-            <a:ext cx="4900320" cy="2742840"/>
+            <a:ext cx="4899960" cy="2742480"/>
           </a:xfrm>
           <a:prstGeom prst="rect">
             <a:avLst/>
@@ -29232,13 +29234,13 @@
         </p:nvPicPr>
         <p:blipFill>
           <a:blip r:embed="rId3"/>
-          <a:srcRect l="0" t="0" r="0" b="62452"/>
+          <a:srcRect l="0" t="0" r="0" b="62437"/>
           <a:stretch/>
         </p:blipFill>
         <p:spPr>
           <a:xfrm>
             <a:off x="7739280" y="1600200"/>
-            <a:ext cx="1404360" cy="685080"/>
+            <a:ext cx="1404000" cy="684720"/>
           </a:xfrm>
           <a:prstGeom prst="rect">
             <a:avLst/>
@@ -29257,7 +29259,7 @@
         <p:spPr>
           <a:xfrm>
             <a:off x="5486400" y="3448800"/>
-            <a:ext cx="2477160" cy="366120"/>
+            <a:ext cx="2476800" cy="365760"/>
           </a:xfrm>
           <a:prstGeom prst="rect">
             <a:avLst/>
@@ -29341,7 +29343,7 @@
         <p:spPr>
           <a:xfrm>
             <a:off x="360000" y="360000"/>
-            <a:ext cx="9351360" cy="891360"/>
+            <a:ext cx="9351000" cy="891000"/>
           </a:xfrm>
           <a:prstGeom prst="rect">
             <a:avLst/>
@@ -29395,7 +29397,7 @@
         <p:spPr>
           <a:xfrm>
             <a:off x="360000" y="1980000"/>
-            <a:ext cx="9171360" cy="4671360"/>
+            <a:ext cx="9171000" cy="4671000"/>
           </a:xfrm>
           <a:prstGeom prst="rect">
             <a:avLst/>
@@ -29506,7 +29508,7 @@
         <p:spPr>
           <a:xfrm>
             <a:off x="7608600" y="6886080"/>
-            <a:ext cx="2276640" cy="356400"/>
+            <a:ext cx="2276280" cy="356040"/>
           </a:xfrm>
           <a:prstGeom prst="rect">
             <a:avLst/>
@@ -29560,7 +29562,7 @@
         <p:spPr>
           <a:xfrm>
             <a:off x="897120" y="6886080"/>
-            <a:ext cx="6438600" cy="356400"/>
+            <a:ext cx="6438240" cy="356040"/>
           </a:xfrm>
           <a:prstGeom prst="rect">
             <a:avLst/>
@@ -29618,7 +29620,7 @@
         <p:spPr>
           <a:xfrm>
             <a:off x="217440" y="1551600"/>
-            <a:ext cx="4736520" cy="2715120"/>
+            <a:ext cx="4736160" cy="2714760"/>
           </a:xfrm>
           <a:prstGeom prst="rect">
             <a:avLst/>
@@ -29641,7 +29643,7 @@
         <p:spPr>
           <a:xfrm>
             <a:off x="4343400" y="3978360"/>
-            <a:ext cx="4965480" cy="2644560"/>
+            <a:ext cx="4965120" cy="2644200"/>
           </a:xfrm>
           <a:prstGeom prst="rect">
             <a:avLst/>
@@ -29665,7 +29667,7 @@
         <p:spPr>
           <a:xfrm>
             <a:off x="7739280" y="1600200"/>
-            <a:ext cx="1404360" cy="913680"/>
+            <a:ext cx="1404000" cy="913320"/>
           </a:xfrm>
           <a:prstGeom prst="rect">
             <a:avLst/>
@@ -29684,7 +29686,7 @@
         <p:spPr>
           <a:xfrm>
             <a:off x="961200" y="4755960"/>
-            <a:ext cx="3382200" cy="1746000"/>
+            <a:ext cx="3381840" cy="1745640"/>
           </a:xfrm>
           <a:prstGeom prst="rect">
             <a:avLst/>
@@ -29776,7 +29778,7 @@
         <p:spPr>
           <a:xfrm>
             <a:off x="5029560" y="1980360"/>
-            <a:ext cx="3129480" cy="917280"/>
+            <a:ext cx="3129120" cy="916920"/>
           </a:xfrm>
           <a:prstGeom prst="rect">
             <a:avLst/>
